--- a/presentation_updated.pptx
+++ b/presentation_updated.pptx
@@ -3774,24 +3774,24 @@
             <a:r>
               <a:rPr lang="en-US" sz="1100" b="1" dirty="0">
                 <a:solidFill>
+                  <a:srgbClr val="F43F5E"/>
+                </a:solidFill>
+              </a:rPr>
+              <a:t>• 🐕‍🦺 Stygian Leash (Cerberus Revenge): </a:t>
+            </a:r>
+            <a:pPr indent="0" marL="0">
+              <a:lnSpc>
+                <a:spcPct val="115000"/>
+              </a:lnSpc>
+              <a:buNone/>
+            </a:pPr>
+            <a:r>
+              <a:rPr lang="en-US" sz="1100" dirty="0">
+                <a:solidFill>
                   <a:srgbClr val="E2E8F0"/>
                 </a:solidFill>
               </a:rPr>
-              <a:t>• Cerberus Revenge: </a:t>
-            </a:r>
-            <a:pPr indent="0" marL="0">
-              <a:lnSpc>
-                <a:spcPct val="115000"/>
-              </a:lnSpc>
-              <a:buNone/>
-            </a:pPr>
-            <a:r>
-              <a:rPr lang="en-US" sz="1100" dirty="0">
-                <a:solidFill>
-                  <a:srgbClr val="F43F5E"/>
-                </a:solidFill>
-              </a:rPr>
-              <a:t>Crews betrayed in R2 can guess their nemesis's vessel to drag them back -150m and surge +150m!
+              <a:t>Tether your rival's boat. If they float: steal 50m. If they crash: drag them down &amp; get +100m! (If your own boat crashes, leash snaps: 0m).
 </a:t>
             </a:r>
             <a:pPr indent="0" marL="0">
